--- a/decks/geog-economic-world/geog-economic-world_ch3_uneven-development.pptx
+++ b/decks/geog-economic-world/geog-economic-world_ch3_uneven-development.pptx
@@ -126,29 +126,29 @@
   <p:extLst>
     <p:ext uri="{521415D9-36F7-43E2-AB2F-B90AF26B5E84}">
       <p14:sectionLst xmlns:p14="http://schemas.microsoft.com/office/powerpoint/2010/main">
-        <p14:section name="Opening" id="{05538d3b-bd70-95b8-b3c1-2aebcc9d7c1b}">
+        <p14:section name="Opening" id="{98e9094e-e5a8-4e0f-ae12-ce0f784b69a2}">
           <p14:sldIdLst>
             <p14:sldId id="256"/>
           </p14:sldIdLst>
         </p14:section>
-        <p14:section name="Gate" id="{b311be00-c38d-4382-f8e1-07dca4555062}">
+        <p14:section name="Gate" id="{78b6a4d9-24a7-4d53-3472-57488fd5435c}">
           <p14:sldIdLst>
             <p14:sldId id="257"/>
             <p14:sldId id="258"/>
           </p14:sldIdLst>
         </p14:section>
-        <p14:section name="Pre-teach" id="{365cef05-0ddd-b6ac-652d-07163a5cb149}">
+        <p14:section name="Pre-teach" id="{d1d0d012-287b-4852-7403-dab95bc88c9d}">
           <p14:sldIdLst>
             <p14:sldId id="259"/>
           </p14:sldIdLst>
         </p14:section>
-        <p14:section name="Read-along" id="{ce23d755-89b7-ef1f-00ae-de75d8391f89}">
+        <p14:section name="Read-along" id="{dbb54949-982a-58d6-282a-09a0e9426cd1}">
           <p14:sldIdLst>
             <p14:sldId id="260"/>
             <p14:sldId id="261"/>
           </p14:sldIdLst>
         </p14:section>
-        <p14:section name="Teach" id="{de47eeea-23ba-bf4a-85f5-13c9ee0e9f22}">
+        <p14:section name="Teach" id="{701721fb-f9e6-0c40-50a5-1b2bb9d54e8f}">
           <p14:sldIdLst>
             <p14:sldId id="262"/>
             <p14:sldId id="263"/>
@@ -157,7 +157,7 @@
             <p14:sldId id="266"/>
           </p14:sldIdLst>
         </p14:section>
-        <p14:section name="Routes" id="{2fde22c7-28fa-5cb0-a2f5-06bbf0bc5b94}">
+        <p14:section name="Routes" id="{87ed0e75-e90e-75eb-fd4c-8d6d27a3aab0}">
           <p14:sldIdLst>
             <p14:sldId id="267"/>
             <p14:sldId id="268"/>
@@ -166,12 +166,12 @@
             <p14:sldId id="271"/>
           </p14:sldIdLst>
         </p14:section>
-        <p14:section name="Close" id="{26a837ae-c909-1573-fd21-08d1edf49ca8}">
+        <p14:section name="Close" id="{bdb22a0a-d37b-99fa-8458-79b17c35299f}">
           <p14:sldIdLst>
             <p14:sldId id="272"/>
           </p14:sldIdLst>
         </p14:section>
-        <p14:section name="Answers" id="{c7b8c02a-9099-e526-a1cc-615a55297ab9}">
+        <p14:section name="Answers" id="{7a9f2be6-e742-55e8-4171-b907ebf13698}">
           <p14:sldIdLst>
             <p14:sldId id="273"/>
             <p14:sldId id="274"/>
